--- a/docs/hub/estate/Planning and Insight/Reports/1052-53/1052-09-02_NSS-1052-Institutional-Summary_v01.pptx
+++ b/docs/hub/estate/Planning and Insight/Reports/1052-53/1052-09-02_NSS-1052-Institutional-Summary_v01.pptx
@@ -3304,7 +3304,7 @@
               </a:defRPr>
             </a:pPr>
             <a:r>
-              <a:t>• Two-year programmes have no finalists in the NSS</a:t>
+              <a:t>• A Faculty average can hide departments moving in opposite directions</a:t>
             </a:r>
           </a:p>
         </p:txBody>
@@ -3402,7 +3402,7 @@
               </a:defRPr>
             </a:pPr>
             <a:r>
-              <a:t>• Overall satisfaction: 3.75 to 3.74</a:t>
+              <a:t>• Overall satisfaction: 3.79 to 3.82</a:t>
             </a:r>
           </a:p>
           <a:p>
@@ -3415,7 +3415,7 @@
               </a:defRPr>
             </a:pPr>
             <a:r>
-              <a:t>• Assessment and Feedback: 3.74 to 3.7</a:t>
+              <a:t>• Assessment and Feedback: 3.65 to 3.62</a:t>
             </a:r>
           </a:p>
           <a:p>
@@ -3428,7 +3428,7 @@
               </a:defRPr>
             </a:pPr>
             <a:r>
-              <a:t>• Respondents: 253</a:t>
+              <a:t>• Respondents: 815</a:t>
             </a:r>
           </a:p>
           <a:p>
@@ -3441,7 +3441,7 @@
               </a:defRPr>
             </a:pPr>
             <a:r>
-              <a:t>• Movement concentrated in Occupational Therapy and Somatic Wellbeing Enquiry</a:t>
+              <a:t>• Department of Health, Assessment and Feedback: 3.63 to 3.57</a:t>
             </a:r>
           </a:p>
           <a:p>
@@ -3454,7 +3454,7 @@
               </a:defRPr>
             </a:pPr>
             <a:r>
-              <a:t>• Department of Education: no finalists, no results</a:t>
+              <a:t>• Department of Education, Assessment and Feedback: 3.7 to 3.72</a:t>
             </a:r>
           </a:p>
         </p:txBody>
